--- a/Hosanna (Praise is Rising)-CH.pptx
+++ b/Hosanna (Praise is Rising)-CH.pptx
@@ -13,10 +13,9 @@
     <p:sldId id="266" r:id="rId7"/>
     <p:sldId id="264" r:id="rId8"/>
     <p:sldId id="262" r:id="rId9"/>
-    <p:sldId id="267" r:id="rId10"/>
-    <p:sldId id="270" r:id="rId11"/>
-    <p:sldId id="268" r:id="rId12"/>
-    <p:sldId id="269" r:id="rId13"/>
+    <p:sldId id="271" r:id="rId10"/>
+    <p:sldId id="268" r:id="rId11"/>
+    <p:sldId id="269" r:id="rId12"/>
   </p:sldIdLst>
   <p:sldSz cx="12192000" cy="6858000"/>
   <p:notesSz cx="6858000" cy="9144000"/>
@@ -270,7 +269,7 @@
           <a:p>
             <a:fld id="{5448A3D2-9408-4143-A73F-7F223505335E}" type="datetimeFigureOut">
               <a:rPr lang="en-US" smtClean="0"/>
-              <a:t>7/11/26</a:t>
+              <a:t>9/12/26</a:t>
             </a:fld>
             <a:endParaRPr lang="en-US"/>
           </a:p>
@@ -468,7 +467,7 @@
           <a:p>
             <a:fld id="{5448A3D2-9408-4143-A73F-7F223505335E}" type="datetimeFigureOut">
               <a:rPr lang="en-US" smtClean="0"/>
-              <a:t>7/11/26</a:t>
+              <a:t>9/12/26</a:t>
             </a:fld>
             <a:endParaRPr lang="en-US"/>
           </a:p>
@@ -676,7 +675,7 @@
           <a:p>
             <a:fld id="{5448A3D2-9408-4143-A73F-7F223505335E}" type="datetimeFigureOut">
               <a:rPr lang="en-US" smtClean="0"/>
-              <a:t>7/11/26</a:t>
+              <a:t>9/12/26</a:t>
             </a:fld>
             <a:endParaRPr lang="en-US"/>
           </a:p>
@@ -874,7 +873,7 @@
           <a:p>
             <a:fld id="{5448A3D2-9408-4143-A73F-7F223505335E}" type="datetimeFigureOut">
               <a:rPr lang="en-US" smtClean="0"/>
-              <a:t>7/11/26</a:t>
+              <a:t>9/12/26</a:t>
             </a:fld>
             <a:endParaRPr lang="en-US"/>
           </a:p>
@@ -1149,7 +1148,7 @@
           <a:p>
             <a:fld id="{5448A3D2-9408-4143-A73F-7F223505335E}" type="datetimeFigureOut">
               <a:rPr lang="en-US" smtClean="0"/>
-              <a:t>7/11/26</a:t>
+              <a:t>9/12/26</a:t>
             </a:fld>
             <a:endParaRPr lang="en-US"/>
           </a:p>
@@ -1414,7 +1413,7 @@
           <a:p>
             <a:fld id="{5448A3D2-9408-4143-A73F-7F223505335E}" type="datetimeFigureOut">
               <a:rPr lang="en-US" smtClean="0"/>
-              <a:t>7/11/26</a:t>
+              <a:t>9/12/26</a:t>
             </a:fld>
             <a:endParaRPr lang="en-US"/>
           </a:p>
@@ -1826,7 +1825,7 @@
           <a:p>
             <a:fld id="{5448A3D2-9408-4143-A73F-7F223505335E}" type="datetimeFigureOut">
               <a:rPr lang="en-US" smtClean="0"/>
-              <a:t>7/11/26</a:t>
+              <a:t>9/12/26</a:t>
             </a:fld>
             <a:endParaRPr lang="en-US"/>
           </a:p>
@@ -1967,7 +1966,7 @@
           <a:p>
             <a:fld id="{5448A3D2-9408-4143-A73F-7F223505335E}" type="datetimeFigureOut">
               <a:rPr lang="en-US" smtClean="0"/>
-              <a:t>7/11/26</a:t>
+              <a:t>9/12/26</a:t>
             </a:fld>
             <a:endParaRPr lang="en-US"/>
           </a:p>
@@ -2080,7 +2079,7 @@
           <a:p>
             <a:fld id="{5448A3D2-9408-4143-A73F-7F223505335E}" type="datetimeFigureOut">
               <a:rPr lang="en-US" smtClean="0"/>
-              <a:t>7/11/26</a:t>
+              <a:t>9/12/26</a:t>
             </a:fld>
             <a:endParaRPr lang="en-US"/>
           </a:p>
@@ -2391,7 +2390,7 @@
           <a:p>
             <a:fld id="{5448A3D2-9408-4143-A73F-7F223505335E}" type="datetimeFigureOut">
               <a:rPr lang="en-US" smtClean="0"/>
-              <a:t>7/11/26</a:t>
+              <a:t>9/12/26</a:t>
             </a:fld>
             <a:endParaRPr lang="en-US"/>
           </a:p>
@@ -2679,7 +2678,7 @@
           <a:p>
             <a:fld id="{5448A3D2-9408-4143-A73F-7F223505335E}" type="datetimeFigureOut">
               <a:rPr lang="en-US" smtClean="0"/>
-              <a:t>7/11/26</a:t>
+              <a:t>9/12/26</a:t>
             </a:fld>
             <a:endParaRPr lang="en-US"/>
           </a:p>
@@ -2920,7 +2919,7 @@
           <a:p>
             <a:fld id="{5448A3D2-9408-4143-A73F-7F223505335E}" type="datetimeFigureOut">
               <a:rPr lang="en-US" smtClean="0"/>
-              <a:t>7/11/26</a:t>
+              <a:t>9/12/26</a:t>
             </a:fld>
             <a:endParaRPr lang="en-US"/>
           </a:p>
@@ -3326,9 +3325,7 @@
     <p:bg>
       <p:bgPr>
         <a:solidFill>
-          <a:schemeClr val="accent1">
-            <a:lumMod val="75000"/>
-          </a:schemeClr>
+          <a:schemeClr val="bg1"/>
         </a:solidFill>
         <a:effectLst/>
       </p:bgPr>
@@ -3353,44 +3350,379 @@
           <a:chExt cx="0" cy="0"/>
         </a:xfrm>
       </p:grpSpPr>
-      <p:sp>
-        <p:nvSpPr>
-          <p:cNvPr id="3" name="Subtitle 2">
-            <a:extLst>
-              <a:ext uri="{FF2B5EF4-FFF2-40B4-BE49-F238E27FC236}">
-                <a16:creationId xmlns:a16="http://schemas.microsoft.com/office/drawing/2014/main" id="{6BDA0964-D419-5F76-ABC2-81AE67A7EC58}"/>
-              </a:ext>
-            </a:extLst>
-          </p:cNvPr>
-          <p:cNvSpPr>
-            <a:spLocks noGrp="1"/>
-          </p:cNvSpPr>
-          <p:nvPr>
-            <p:ph type="subTitle" idx="1"/>
+      <p:sp useBgFill="1">
+        <p:nvSpPr>
+          <p:cNvPr id="9" name="Rectangle 8">
+            <a:extLst>
+              <a:ext uri="{FF2B5EF4-FFF2-40B4-BE49-F238E27FC236}">
+                <a16:creationId xmlns:a16="http://schemas.microsoft.com/office/drawing/2014/main" id="{E91DC736-0EF8-4F87-9146-EBF1D2EE4D3D}"/>
+              </a:ext>
+              <a:ext uri="{C183D7F6-B498-43B3-948B-1728B52AA6E4}">
+                <adec:decorative xmlns:adec="http://schemas.microsoft.com/office/drawing/2017/decorative" val="1"/>
+              </a:ext>
+            </a:extLst>
+          </p:cNvPr>
+          <p:cNvSpPr>
+            <a:spLocks noGrp="1" noRot="1" noChangeAspect="1" noMove="1" noResize="1" noEditPoints="1" noAdjustHandles="1" noChangeArrowheads="1" noChangeShapeType="1" noTextEdit="1"/>
+          </p:cNvSpPr>
+          <p:nvPr>
+            <p:extLst>
+              <p:ext uri="{386F3935-93C4-4BCD-93E2-E3B085C9AB24}">
+                <p16:designElem xmlns:p16="http://schemas.microsoft.com/office/powerpoint/2015/main" val="1"/>
+              </p:ext>
+            </p:extLst>
           </p:nvPr>
         </p:nvSpPr>
         <p:spPr>
           <a:xfrm>
-            <a:off x="356260" y="166255"/>
-            <a:ext cx="11388436" cy="6567053"/>
+            <a:off x="0" y="0"/>
+            <a:ext cx="12192000" cy="6858000"/>
+          </a:xfrm>
+          <a:prstGeom prst="rect">
+            <a:avLst/>
+          </a:prstGeom>
+          <a:ln>
+            <a:noFill/>
+          </a:ln>
+        </p:spPr>
+        <p:style>
+          <a:lnRef idx="2">
+            <a:schemeClr val="accent1">
+              <a:shade val="50000"/>
+            </a:schemeClr>
+          </a:lnRef>
+          <a:fillRef idx="1">
+            <a:schemeClr val="accent1"/>
+          </a:fillRef>
+          <a:effectRef idx="0">
+            <a:schemeClr val="accent1"/>
+          </a:effectRef>
+          <a:fontRef idx="minor">
+            <a:schemeClr val="lt1"/>
+          </a:fontRef>
+        </p:style>
+        <p:txBody>
+          <a:bodyPr rtlCol="0" anchor="ctr"/>
+          <a:lstStyle/>
+          <a:p>
+            <a:pPr algn="ctr"/>
+            <a:endParaRPr lang="en-US"/>
+          </a:p>
+        </p:txBody>
+      </p:sp>
+      <p:pic>
+        <p:nvPicPr>
+          <p:cNvPr id="4" name="Picture 3">
+            <a:extLst>
+              <a:ext uri="{FF2B5EF4-FFF2-40B4-BE49-F238E27FC236}">
+                <a16:creationId xmlns:a16="http://schemas.microsoft.com/office/drawing/2014/main" id="{71889D89-AA11-C2D6-6A25-36901A20BA26}"/>
+              </a:ext>
+            </a:extLst>
+          </p:cNvPr>
+          <p:cNvPicPr>
+            <a:picLocks noChangeAspect="1"/>
+          </p:cNvPicPr>
+          <p:nvPr/>
+        </p:nvPicPr>
+        <p:blipFill>
+          <a:blip r:embed="rId2"/>
+          <a:srcRect t="9091" r="13818"/>
+          <a:stretch>
+            <a:fillRect/>
+          </a:stretch>
+        </p:blipFill>
+        <p:spPr>
+          <a:xfrm>
+            <a:off x="3523488" y="10"/>
+            <a:ext cx="8668512" cy="6857990"/>
+          </a:xfrm>
+          <a:prstGeom prst="rect">
+            <a:avLst/>
+          </a:prstGeom>
+        </p:spPr>
+      </p:pic>
+      <p:sp>
+        <p:nvSpPr>
+          <p:cNvPr id="11" name="Rectangle 10">
+            <a:extLst>
+              <a:ext uri="{FF2B5EF4-FFF2-40B4-BE49-F238E27FC236}">
+                <a16:creationId xmlns:a16="http://schemas.microsoft.com/office/drawing/2014/main" id="{097CD68E-23E3-4007-8847-CD0944C4F7BE}"/>
+              </a:ext>
+              <a:ext uri="{C183D7F6-B498-43B3-948B-1728B52AA6E4}">
+                <adec:decorative xmlns:adec="http://schemas.microsoft.com/office/drawing/2017/decorative" val="1"/>
+              </a:ext>
+            </a:extLst>
+          </p:cNvPr>
+          <p:cNvSpPr>
+            <a:spLocks noGrp="1" noRot="1" noChangeAspect="1" noMove="1" noResize="1" noEditPoints="1" noAdjustHandles="1" noChangeArrowheads="1" noChangeShapeType="1" noTextEdit="1"/>
+          </p:cNvSpPr>
+          <p:nvPr>
+            <p:extLst>
+              <p:ext uri="{386F3935-93C4-4BCD-93E2-E3B085C9AB24}">
+                <p16:designElem xmlns:p16="http://schemas.microsoft.com/office/powerpoint/2015/main" val="1"/>
+              </p:ext>
+            </p:extLst>
+          </p:nvPr>
+        </p:nvSpPr>
+        <p:spPr>
+          <a:xfrm>
+            <a:off x="0" y="0"/>
+            <a:ext cx="9756601" cy="6858000"/>
+          </a:xfrm>
+          <a:prstGeom prst="rect">
+            <a:avLst/>
+          </a:prstGeom>
+          <a:gradFill>
+            <a:gsLst>
+              <a:gs pos="58000">
+                <a:schemeClr val="bg1"/>
+              </a:gs>
+              <a:gs pos="35000">
+                <a:schemeClr val="bg1">
+                  <a:alpha val="79000"/>
+                </a:schemeClr>
+              </a:gs>
+              <a:gs pos="19000">
+                <a:schemeClr val="bg1">
+                  <a:alpha val="38000"/>
+                </a:schemeClr>
+              </a:gs>
+              <a:gs pos="0">
+                <a:schemeClr val="bg1">
+                  <a:alpha val="0"/>
+                </a:schemeClr>
+              </a:gs>
+              <a:gs pos="100000">
+                <a:schemeClr val="bg1"/>
+              </a:gs>
+            </a:gsLst>
+            <a:lin ang="10800000" scaled="0"/>
+          </a:gradFill>
+          <a:ln>
+            <a:noFill/>
+          </a:ln>
+        </p:spPr>
+        <p:style>
+          <a:lnRef idx="2">
+            <a:schemeClr val="accent1">
+              <a:shade val="50000"/>
+            </a:schemeClr>
+          </a:lnRef>
+          <a:fillRef idx="1">
+            <a:schemeClr val="accent1"/>
+          </a:fillRef>
+          <a:effectRef idx="0">
+            <a:schemeClr val="accent1"/>
+          </a:effectRef>
+          <a:fontRef idx="minor">
+            <a:schemeClr val="lt1"/>
+          </a:fontRef>
+        </p:style>
+        <p:txBody>
+          <a:bodyPr rtlCol="0" anchor="ctr"/>
+          <a:lstStyle/>
+          <a:p>
+            <a:pPr algn="ctr"/>
+            <a:endParaRPr lang="en-US" dirty="0"/>
+          </a:p>
+        </p:txBody>
+      </p:sp>
+      <p:sp>
+        <p:nvSpPr>
+          <p:cNvPr id="3" name="Subtitle 2">
+            <a:extLst>
+              <a:ext uri="{FF2B5EF4-FFF2-40B4-BE49-F238E27FC236}">
+                <a16:creationId xmlns:a16="http://schemas.microsoft.com/office/drawing/2014/main" id="{6BDA0964-D419-5F76-ABC2-81AE67A7EC58}"/>
+              </a:ext>
+            </a:extLst>
+          </p:cNvPr>
+          <p:cNvSpPr>
+            <a:spLocks noGrp="1"/>
+          </p:cNvSpPr>
+          <p:nvPr>
+            <p:ph type="subTitle" idx="1"/>
+          </p:nvPr>
+        </p:nvSpPr>
+        <p:spPr>
+          <a:xfrm>
+            <a:off x="259308" y="1154750"/>
+            <a:ext cx="7598436" cy="859768"/>
           </a:xfrm>
         </p:spPr>
         <p:txBody>
           <a:bodyPr>
-            <a:noAutofit/>
+            <a:normAutofit/>
           </a:bodyPr>
           <a:lstStyle/>
           <a:p>
             <a:pPr algn="l"/>
             <a:r>
-              <a:rPr lang="en-US" sz="7200" dirty="0">
-                <a:solidFill>
-                  <a:schemeClr val="bg1"/>
-                </a:solidFill>
-                <a:latin typeface="Avenir Book" panose="02000503020000020003" pitchFamily="2" charset="0"/>
-              </a:rPr>
-              <a:t>Hosanna</a:t>
-            </a:r>
+              <a:rPr lang="en-US" sz="4800" dirty="0">
+                <a:latin typeface="Avenir Book" panose="02000503020000020003" pitchFamily="2" charset="0"/>
+              </a:rPr>
+              <a:t>Hosanna (Praise Is Rising)</a:t>
+            </a:r>
+          </a:p>
+        </p:txBody>
+      </p:sp>
+      <p:sp>
+        <p:nvSpPr>
+          <p:cNvPr id="13" name="Rectangle 12">
+            <a:extLst>
+              <a:ext uri="{FF2B5EF4-FFF2-40B4-BE49-F238E27FC236}">
+                <a16:creationId xmlns:a16="http://schemas.microsoft.com/office/drawing/2014/main" id="{AF2F604E-43BE-4DC3-B983-E071523364F8}"/>
+              </a:ext>
+              <a:ext uri="{C183D7F6-B498-43B3-948B-1728B52AA6E4}">
+                <adec:decorative xmlns:adec="http://schemas.microsoft.com/office/drawing/2017/decorative" val="1"/>
+              </a:ext>
+            </a:extLst>
+          </p:cNvPr>
+          <p:cNvSpPr>
+            <a:spLocks noGrp="1" noRot="1" noChangeAspect="1" noMove="1" noResize="1" noEditPoints="1" noAdjustHandles="1" noChangeArrowheads="1" noChangeShapeType="1" noTextEdit="1"/>
+          </p:cNvSpPr>
+          <p:nvPr>
+            <p:extLst>
+              <p:ext uri="{386F3935-93C4-4BCD-93E2-E3B085C9AB24}">
+                <p16:designElem xmlns:p16="http://schemas.microsoft.com/office/powerpoint/2015/main" val="1"/>
+              </p:ext>
+            </p:extLst>
+          </p:nvPr>
+        </p:nvSpPr>
+        <p:spPr>
+          <a:xfrm rot="5400000">
+            <a:off x="759921" y="346791"/>
+            <a:ext cx="146304" cy="704088"/>
+          </a:xfrm>
+          <a:prstGeom prst="rect">
+            <a:avLst/>
+          </a:prstGeom>
+          <a:solidFill>
+            <a:schemeClr val="accent2"/>
+          </a:solidFill>
+          <a:ln>
+            <a:noFill/>
+          </a:ln>
+        </p:spPr>
+        <p:style>
+          <a:lnRef idx="2">
+            <a:schemeClr val="accent1">
+              <a:shade val="50000"/>
+            </a:schemeClr>
+          </a:lnRef>
+          <a:fillRef idx="1">
+            <a:schemeClr val="accent1"/>
+          </a:fillRef>
+          <a:effectRef idx="0">
+            <a:schemeClr val="accent1"/>
+          </a:effectRef>
+          <a:fontRef idx="minor">
+            <a:schemeClr val="lt1"/>
+          </a:fontRef>
+        </p:style>
+        <p:txBody>
+          <a:bodyPr rtlCol="0" anchor="ctr"/>
+          <a:lstStyle/>
+          <a:p>
+            <a:pPr algn="ctr"/>
+            <a:endParaRPr lang="en-US">
+              <a:solidFill>
+                <a:prstClr val="white"/>
+              </a:solidFill>
+              <a:latin typeface="Calibri" panose="020F0502020204030204"/>
+            </a:endParaRPr>
+          </a:p>
+        </p:txBody>
+      </p:sp>
+      <p:sp>
+        <p:nvSpPr>
+          <p:cNvPr id="15" name="Rectangle 14">
+            <a:extLst>
+              <a:ext uri="{FF2B5EF4-FFF2-40B4-BE49-F238E27FC236}">
+                <a16:creationId xmlns:a16="http://schemas.microsoft.com/office/drawing/2014/main" id="{08C9B587-E65E-4B52-B37C-ABEBB6E87928}"/>
+              </a:ext>
+              <a:ext uri="{C183D7F6-B498-43B3-948B-1728B52AA6E4}">
+                <adec:decorative xmlns:adec="http://schemas.microsoft.com/office/drawing/2017/decorative" val="1"/>
+              </a:ext>
+            </a:extLst>
+          </p:cNvPr>
+          <p:cNvSpPr>
+            <a:spLocks noGrp="1" noRot="1" noChangeAspect="1" noMove="1" noResize="1" noEditPoints="1" noAdjustHandles="1" noChangeArrowheads="1" noChangeShapeType="1" noTextEdit="1"/>
+          </p:cNvSpPr>
+          <p:nvPr>
+            <p:extLst>
+              <p:ext uri="{386F3935-93C4-4BCD-93E2-E3B085C9AB24}">
+                <p16:designElem xmlns:p16="http://schemas.microsoft.com/office/powerpoint/2015/main" val="1"/>
+              </p:ext>
+            </p:extLst>
+          </p:nvPr>
+        </p:nvSpPr>
+        <p:spPr>
+          <a:xfrm>
+            <a:off x="481029" y="4546920"/>
+            <a:ext cx="3977640" cy="18288"/>
+          </a:xfrm>
+          <a:prstGeom prst="rect">
+            <a:avLst/>
+          </a:prstGeom>
+          <a:solidFill>
+            <a:srgbClr val="D5D5D5"/>
+          </a:solidFill>
+          <a:ln w="3175">
+            <a:noFill/>
+          </a:ln>
+          <a:effectLst/>
+        </p:spPr>
+        <p:style>
+          <a:lnRef idx="2">
+            <a:schemeClr val="accent1">
+              <a:shade val="50000"/>
+            </a:schemeClr>
+          </a:lnRef>
+          <a:fillRef idx="1">
+            <a:schemeClr val="accent1"/>
+          </a:fillRef>
+          <a:effectRef idx="0">
+            <a:schemeClr val="accent1"/>
+          </a:effectRef>
+          <a:fontRef idx="minor">
+            <a:schemeClr val="lt1"/>
+          </a:fontRef>
+        </p:style>
+        <p:txBody>
+          <a:bodyPr rtlCol="0" anchor="ctr"/>
+          <a:lstStyle/>
+          <a:p>
+            <a:pPr marL="0" marR="0" lvl="0" indent="0" algn="ctr" defTabSz="914400" rtl="0" eaLnBrk="1" fontAlgn="auto" latinLnBrk="0" hangingPunct="1">
+              <a:lnSpc>
+                <a:spcPct val="100000"/>
+              </a:lnSpc>
+              <a:spcBef>
+                <a:spcPts val="0"/>
+              </a:spcBef>
+              <a:spcAft>
+                <a:spcPts val="0"/>
+              </a:spcAft>
+              <a:buClrTx/>
+              <a:buSzTx/>
+              <a:buFontTx/>
+              <a:buNone/>
+              <a:tabLst/>
+              <a:defRPr/>
+            </a:pPr>
+            <a:endParaRPr kumimoji="0" lang="en-US" sz="1800" b="0" i="0" u="none" strike="noStrike" kern="1200" cap="none" spc="0" normalizeH="0" baseline="0" noProof="0">
+              <a:ln>
+                <a:noFill/>
+              </a:ln>
+              <a:solidFill>
+                <a:prstClr val="white"/>
+              </a:solidFill>
+              <a:effectLst/>
+              <a:uLnTx/>
+              <a:uFillTx/>
+              <a:latin typeface="Calibri" panose="020F0502020204030204"/>
+              <a:ea typeface="+mn-ea"/>
+              <a:cs typeface="+mn-cs"/>
+            </a:endParaRPr>
           </a:p>
         </p:txBody>
       </p:sp>
@@ -3408,296 +3740,6 @@
 </file>
 
 <file path=ppt/slides/slide10.xml><?xml version="1.0" encoding="utf-8"?>
-<p:sld xmlns:a="http://schemas.openxmlformats.org/drawingml/2006/main" xmlns:r="http://schemas.openxmlformats.org/officeDocument/2006/relationships" xmlns:p="http://schemas.openxmlformats.org/presentationml/2006/main">
-  <p:cSld>
-    <p:bg>
-      <p:bgPr>
-        <a:solidFill>
-          <a:schemeClr val="accent1">
-            <a:lumMod val="75000"/>
-          </a:schemeClr>
-        </a:solidFill>
-        <a:effectLst/>
-      </p:bgPr>
-    </p:bg>
-    <p:spTree>
-      <p:nvGrpSpPr>
-        <p:cNvPr id="1" name="">
-          <a:extLst>
-            <a:ext uri="{FF2B5EF4-FFF2-40B4-BE49-F238E27FC236}">
-              <a16:creationId xmlns:a16="http://schemas.microsoft.com/office/drawing/2014/main" id="{AD02B363-D4DA-8709-AFF7-08C3C47ED235}"/>
-            </a:ext>
-          </a:extLst>
-        </p:cNvPr>
-        <p:cNvGrpSpPr/>
-        <p:nvPr/>
-      </p:nvGrpSpPr>
-      <p:grpSpPr>
-        <a:xfrm>
-          <a:off x="0" y="0"/>
-          <a:ext cx="0" cy="0"/>
-          <a:chOff x="0" y="0"/>
-          <a:chExt cx="0" cy="0"/>
-        </a:xfrm>
-      </p:grpSpPr>
-      <p:sp>
-        <p:nvSpPr>
-          <p:cNvPr id="2" name="Title 1">
-            <a:extLst>
-              <a:ext uri="{FF2B5EF4-FFF2-40B4-BE49-F238E27FC236}">
-                <a16:creationId xmlns:a16="http://schemas.microsoft.com/office/drawing/2014/main" id="{B93CE152-C8C3-6E60-57A1-E8C1287C5246}"/>
-              </a:ext>
-            </a:extLst>
-          </p:cNvPr>
-          <p:cNvSpPr>
-            <a:spLocks noGrp="1"/>
-          </p:cNvSpPr>
-          <p:nvPr>
-            <p:ph type="ctrTitle"/>
-          </p:nvPr>
-        </p:nvSpPr>
-        <p:spPr>
-          <a:xfrm>
-            <a:off x="0" y="22612"/>
-            <a:ext cx="12192000" cy="953572"/>
-          </a:xfrm>
-        </p:spPr>
-        <p:txBody>
-          <a:bodyPr>
-            <a:normAutofit/>
-          </a:bodyPr>
-          <a:lstStyle/>
-          <a:p>
-            <a:pPr algn="l"/>
-            <a:r>
-              <a:rPr lang="en-US" sz="4800" dirty="0">
-                <a:solidFill>
-                  <a:schemeClr val="bg1"/>
-                </a:solidFill>
-                <a:latin typeface="Avenir Book" panose="02000503020000020003" pitchFamily="2" charset="0"/>
-              </a:rPr>
-              <a:t>Pre-Chorus</a:t>
-            </a:r>
-          </a:p>
-        </p:txBody>
-      </p:sp>
-      <p:sp>
-        <p:nvSpPr>
-          <p:cNvPr id="3" name="Subtitle 2">
-            <a:extLst>
-              <a:ext uri="{FF2B5EF4-FFF2-40B4-BE49-F238E27FC236}">
-                <a16:creationId xmlns:a16="http://schemas.microsoft.com/office/drawing/2014/main" id="{0A35B3E8-70E2-CE39-012C-8C5B0E8D4B45}"/>
-              </a:ext>
-            </a:extLst>
-          </p:cNvPr>
-          <p:cNvSpPr>
-            <a:spLocks noGrp="1"/>
-          </p:cNvSpPr>
-          <p:nvPr>
-            <p:ph type="subTitle" idx="1"/>
-          </p:nvPr>
-        </p:nvSpPr>
-        <p:spPr>
-          <a:xfrm>
-            <a:off x="356260" y="976184"/>
-            <a:ext cx="11388436" cy="5301047"/>
-          </a:xfrm>
-        </p:spPr>
-        <p:txBody>
-          <a:bodyPr>
-            <a:noAutofit/>
-          </a:bodyPr>
-          <a:lstStyle/>
-          <a:p>
-            <a:pPr algn="l"/>
-            <a:r>
-              <a:rPr lang="en-US" sz="3200" dirty="0">
-                <a:solidFill>
-                  <a:schemeClr val="bg1"/>
-                </a:solidFill>
-                <a:latin typeface="Avenir Book" panose="02000503020000020003" pitchFamily="2" charset="0"/>
-              </a:rPr>
-              <a:t>                           </a:t>
-            </a:r>
-            <a:r>
-              <a:rPr lang="en-US" sz="3200" dirty="0">
-                <a:solidFill>
-                  <a:srgbClr val="FFFF00"/>
-                </a:solidFill>
-                <a:latin typeface="Avenir Book" panose="02000503020000020003" pitchFamily="2" charset="0"/>
-              </a:rPr>
-              <a:t>D</a:t>
-            </a:r>
-          </a:p>
-          <a:p>
-            <a:pPr algn="l"/>
-            <a:r>
-              <a:rPr lang="en-US" sz="3200" dirty="0" err="1">
-                <a:solidFill>
-                  <a:schemeClr val="bg1"/>
-                </a:solidFill>
-                <a:latin typeface="Avenir Book" panose="02000503020000020003" pitchFamily="2" charset="0"/>
-              </a:rPr>
-              <a:t>'Cause</a:t>
-            </a:r>
-            <a:r>
-              <a:rPr lang="en-US" sz="3200" dirty="0">
-                <a:solidFill>
-                  <a:schemeClr val="bg1"/>
-                </a:solidFill>
-                <a:latin typeface="Avenir Book" panose="02000503020000020003" pitchFamily="2" charset="0"/>
-              </a:rPr>
-              <a:t> when we see You</a:t>
-            </a:r>
-          </a:p>
-          <a:p>
-            <a:pPr algn="l"/>
-            <a:r>
-              <a:rPr lang="en-US" sz="3200" dirty="0">
-                <a:solidFill>
-                  <a:schemeClr val="bg1"/>
-                </a:solidFill>
-                <a:latin typeface="Avenir Book" panose="02000503020000020003" pitchFamily="2" charset="0"/>
-              </a:rPr>
-              <a:t>             </a:t>
-            </a:r>
-            <a:r>
-              <a:rPr lang="en-US" sz="3200" dirty="0">
-                <a:solidFill>
-                  <a:srgbClr val="FFFF00"/>
-                </a:solidFill>
-                <a:latin typeface="Avenir Book" panose="02000503020000020003" pitchFamily="2" charset="0"/>
-              </a:rPr>
-              <a:t>C                              G</a:t>
-            </a:r>
-            <a:endParaRPr lang="en-US" sz="3200" dirty="0">
-              <a:solidFill>
-                <a:schemeClr val="bg1"/>
-              </a:solidFill>
-              <a:latin typeface="Avenir Book" panose="02000503020000020003" pitchFamily="2" charset="0"/>
-            </a:endParaRPr>
-          </a:p>
-          <a:p>
-            <a:pPr algn="l"/>
-            <a:r>
-              <a:rPr lang="en-US" sz="3200" dirty="0">
-                <a:solidFill>
-                  <a:schemeClr val="bg1"/>
-                </a:solidFill>
-                <a:latin typeface="Avenir Book" panose="02000503020000020003" pitchFamily="2" charset="0"/>
-              </a:rPr>
-              <a:t>We find strength to face the day</a:t>
-            </a:r>
-          </a:p>
-          <a:p>
-            <a:pPr algn="l"/>
-            <a:r>
-              <a:rPr lang="en-US" sz="3200" dirty="0">
-                <a:solidFill>
-                  <a:schemeClr val="bg1"/>
-                </a:solidFill>
-                <a:latin typeface="Avenir Book" panose="02000503020000020003" pitchFamily="2" charset="0"/>
-              </a:rPr>
-              <a:t>  </a:t>
-            </a:r>
-            <a:r>
-              <a:rPr lang="en-US" sz="3200" dirty="0">
-                <a:solidFill>
-                  <a:srgbClr val="FFFF00"/>
-                </a:solidFill>
-                <a:latin typeface="Avenir Book" panose="02000503020000020003" pitchFamily="2" charset="0"/>
-              </a:rPr>
-              <a:t>                  D</a:t>
-            </a:r>
-            <a:endParaRPr lang="en-US" sz="3200" dirty="0">
-              <a:solidFill>
-                <a:schemeClr val="bg1"/>
-              </a:solidFill>
-              <a:latin typeface="Avenir Book" panose="02000503020000020003" pitchFamily="2" charset="0"/>
-            </a:endParaRPr>
-          </a:p>
-          <a:p>
-            <a:pPr algn="l"/>
-            <a:r>
-              <a:rPr lang="en-US" sz="3200" dirty="0">
-                <a:solidFill>
-                  <a:schemeClr val="bg1"/>
-                </a:solidFill>
-                <a:latin typeface="Avenir Book" panose="02000503020000020003" pitchFamily="2" charset="0"/>
-              </a:rPr>
-              <a:t>And in Your presence </a:t>
-            </a:r>
-          </a:p>
-          <a:p>
-            <a:pPr algn="l"/>
-            <a:r>
-              <a:rPr lang="en-US" sz="3200" dirty="0">
-                <a:solidFill>
-                  <a:srgbClr val="FFFF00"/>
-                </a:solidFill>
-                <a:latin typeface="Avenir Book" panose="02000503020000020003" pitchFamily="2" charset="0"/>
-              </a:rPr>
-              <a:t>           C                           G</a:t>
-            </a:r>
-          </a:p>
-          <a:p>
-            <a:pPr algn="l"/>
-            <a:r>
-              <a:rPr lang="en-US" sz="3200" dirty="0">
-                <a:solidFill>
-                  <a:schemeClr val="bg1"/>
-                </a:solidFill>
-                <a:latin typeface="Avenir Book" panose="02000503020000020003" pitchFamily="2" charset="0"/>
-              </a:rPr>
-              <a:t>All our fears are washed away</a:t>
-            </a:r>
-          </a:p>
-          <a:p>
-            <a:pPr algn="l"/>
-            <a:r>
-              <a:rPr lang="en-US" sz="3200" dirty="0">
-                <a:solidFill>
-                  <a:srgbClr val="FFFF00"/>
-                </a:solidFill>
-                <a:latin typeface="Avenir Book" panose="02000503020000020003" pitchFamily="2" charset="0"/>
-              </a:rPr>
-              <a:t>              D</a:t>
-            </a:r>
-            <a:endParaRPr lang="en-US" sz="3200" dirty="0">
-              <a:solidFill>
-                <a:schemeClr val="bg1"/>
-              </a:solidFill>
-              <a:latin typeface="Avenir Book" panose="02000503020000020003" pitchFamily="2" charset="0"/>
-            </a:endParaRPr>
-          </a:p>
-          <a:p>
-            <a:pPr algn="l"/>
-            <a:r>
-              <a:rPr lang="en-US" sz="3200" dirty="0">
-                <a:solidFill>
-                  <a:schemeClr val="bg1"/>
-                </a:solidFill>
-                <a:latin typeface="Avenir Book" panose="02000503020000020003" pitchFamily="2" charset="0"/>
-              </a:rPr>
-              <a:t>washed  away</a:t>
-            </a:r>
-          </a:p>
-        </p:txBody>
-      </p:sp>
-    </p:spTree>
-    <p:extLst>
-      <p:ext uri="{BB962C8B-B14F-4D97-AF65-F5344CB8AC3E}">
-        <p14:creationId xmlns:p14="http://schemas.microsoft.com/office/powerpoint/2010/main" val="64117844"/>
-      </p:ext>
-    </p:extLst>
-  </p:cSld>
-  <p:clrMapOvr>
-    <a:masterClrMapping/>
-  </p:clrMapOvr>
-</p:sld>
-</file>
-
-<file path=ppt/slides/slide11.xml><?xml version="1.0" encoding="utf-8"?>
 <p:sld xmlns:a="http://schemas.openxmlformats.org/drawingml/2006/main" xmlns:r="http://schemas.openxmlformats.org/officeDocument/2006/relationships" xmlns:p="http://schemas.openxmlformats.org/presentationml/2006/main">
   <p:cSld>
     <p:bg>
@@ -3730,47 +3772,6 @@
       </p:grpSpPr>
       <p:sp>
         <p:nvSpPr>
-          <p:cNvPr id="2" name="Title 1">
-            <a:extLst>
-              <a:ext uri="{FF2B5EF4-FFF2-40B4-BE49-F238E27FC236}">
-                <a16:creationId xmlns:a16="http://schemas.microsoft.com/office/drawing/2014/main" id="{A18FCADE-3BBE-1EE8-9F2B-B5E4D756D057}"/>
-              </a:ext>
-            </a:extLst>
-          </p:cNvPr>
-          <p:cNvSpPr>
-            <a:spLocks noGrp="1"/>
-          </p:cNvSpPr>
-          <p:nvPr>
-            <p:ph type="ctrTitle"/>
-          </p:nvPr>
-        </p:nvSpPr>
-        <p:spPr>
-          <a:xfrm>
-            <a:off x="0" y="22612"/>
-            <a:ext cx="12192000" cy="953572"/>
-          </a:xfrm>
-        </p:spPr>
-        <p:txBody>
-          <a:bodyPr>
-            <a:normAutofit/>
-          </a:bodyPr>
-          <a:lstStyle/>
-          <a:p>
-            <a:pPr algn="l"/>
-            <a:r>
-              <a:rPr lang="en-US" sz="4800" dirty="0">
-                <a:solidFill>
-                  <a:schemeClr val="bg1"/>
-                </a:solidFill>
-                <a:latin typeface="Avenir Book" panose="02000503020000020003" pitchFamily="2" charset="0"/>
-              </a:rPr>
-              <a:t>Chorus 1</a:t>
-            </a:r>
-          </a:p>
-        </p:txBody>
-      </p:sp>
-      <p:sp>
-        <p:nvSpPr>
           <p:cNvPr id="3" name="Subtitle 2">
             <a:extLst>
               <a:ext uri="{FF2B5EF4-FFF2-40B4-BE49-F238E27FC236}">
@@ -3937,7 +3938,7 @@
 </p:sld>
 </file>
 
-<file path=ppt/slides/slide12.xml><?xml version="1.0" encoding="utf-8"?>
+<file path=ppt/slides/slide11.xml><?xml version="1.0" encoding="utf-8"?>
 <p:sld xmlns:a="http://schemas.openxmlformats.org/drawingml/2006/main" xmlns:r="http://schemas.openxmlformats.org/officeDocument/2006/relationships" xmlns:p="http://schemas.openxmlformats.org/presentationml/2006/main">
   <p:cSld>
     <p:bg>
@@ -3968,47 +3969,6 @@
           <a:chExt cx="0" cy="0"/>
         </a:xfrm>
       </p:grpSpPr>
-      <p:sp>
-        <p:nvSpPr>
-          <p:cNvPr id="2" name="Title 1">
-            <a:extLst>
-              <a:ext uri="{FF2B5EF4-FFF2-40B4-BE49-F238E27FC236}">
-                <a16:creationId xmlns:a16="http://schemas.microsoft.com/office/drawing/2014/main" id="{F0A085A2-0E1A-6A25-8891-C8B3CEF17434}"/>
-              </a:ext>
-            </a:extLst>
-          </p:cNvPr>
-          <p:cNvSpPr>
-            <a:spLocks noGrp="1"/>
-          </p:cNvSpPr>
-          <p:nvPr>
-            <p:ph type="ctrTitle"/>
-          </p:nvPr>
-        </p:nvSpPr>
-        <p:spPr>
-          <a:xfrm>
-            <a:off x="0" y="22612"/>
-            <a:ext cx="12192000" cy="953572"/>
-          </a:xfrm>
-        </p:spPr>
-        <p:txBody>
-          <a:bodyPr>
-            <a:normAutofit/>
-          </a:bodyPr>
-          <a:lstStyle/>
-          <a:p>
-            <a:pPr algn="l"/>
-            <a:r>
-              <a:rPr lang="en-US" sz="4800" dirty="0">
-                <a:solidFill>
-                  <a:schemeClr val="bg1"/>
-                </a:solidFill>
-                <a:latin typeface="Avenir Book" panose="02000503020000020003" pitchFamily="2" charset="0"/>
-              </a:rPr>
-              <a:t>Chorus 2</a:t>
-            </a:r>
-          </a:p>
-        </p:txBody>
-      </p:sp>
       <p:sp>
         <p:nvSpPr>
           <p:cNvPr id="3" name="Subtitle 2">
@@ -4248,65 +4208,24 @@
       </p:grpSpPr>
       <p:sp>
         <p:nvSpPr>
-          <p:cNvPr id="2" name="Title 1">
-            <a:extLst>
-              <a:ext uri="{FF2B5EF4-FFF2-40B4-BE49-F238E27FC236}">
-                <a16:creationId xmlns:a16="http://schemas.microsoft.com/office/drawing/2014/main" id="{DC365080-879F-AB91-1371-2CE7889929E7}"/>
-              </a:ext>
-            </a:extLst>
-          </p:cNvPr>
-          <p:cNvSpPr>
-            <a:spLocks noGrp="1"/>
-          </p:cNvSpPr>
-          <p:nvPr>
-            <p:ph type="ctrTitle"/>
+          <p:cNvPr id="3" name="Subtitle 2">
+            <a:extLst>
+              <a:ext uri="{FF2B5EF4-FFF2-40B4-BE49-F238E27FC236}">
+                <a16:creationId xmlns:a16="http://schemas.microsoft.com/office/drawing/2014/main" id="{BF96914E-E381-4BDD-55FC-EC2C20BFEABD}"/>
+              </a:ext>
+            </a:extLst>
+          </p:cNvPr>
+          <p:cNvSpPr>
+            <a:spLocks noGrp="1"/>
+          </p:cNvSpPr>
+          <p:nvPr>
+            <p:ph type="subTitle" idx="1"/>
           </p:nvPr>
         </p:nvSpPr>
         <p:spPr>
           <a:xfrm>
-            <a:off x="0" y="22612"/>
-            <a:ext cx="12192000" cy="953572"/>
-          </a:xfrm>
-        </p:spPr>
-        <p:txBody>
-          <a:bodyPr>
-            <a:normAutofit/>
-          </a:bodyPr>
-          <a:lstStyle/>
-          <a:p>
-            <a:pPr algn="l"/>
-            <a:r>
-              <a:rPr lang="en-US" sz="4800" dirty="0">
-                <a:solidFill>
-                  <a:schemeClr val="bg1"/>
-                </a:solidFill>
-                <a:latin typeface="Avenir Book" panose="02000503020000020003" pitchFamily="2" charset="0"/>
-              </a:rPr>
-              <a:t>Verse 1</a:t>
-            </a:r>
-          </a:p>
-        </p:txBody>
-      </p:sp>
-      <p:sp>
-        <p:nvSpPr>
-          <p:cNvPr id="3" name="Subtitle 2">
-            <a:extLst>
-              <a:ext uri="{FF2B5EF4-FFF2-40B4-BE49-F238E27FC236}">
-                <a16:creationId xmlns:a16="http://schemas.microsoft.com/office/drawing/2014/main" id="{BF96914E-E381-4BDD-55FC-EC2C20BFEABD}"/>
-              </a:ext>
-            </a:extLst>
-          </p:cNvPr>
-          <p:cNvSpPr>
-            <a:spLocks noGrp="1"/>
-          </p:cNvSpPr>
-          <p:nvPr>
-            <p:ph type="subTitle" idx="1"/>
-          </p:nvPr>
-        </p:nvSpPr>
-        <p:spPr>
-          <a:xfrm>
-            <a:off x="356260" y="976184"/>
-            <a:ext cx="11388436" cy="5301047"/>
+            <a:off x="356260" y="322729"/>
+            <a:ext cx="11388436" cy="6275295"/>
           </a:xfrm>
         </p:spPr>
         <p:txBody>
@@ -4431,8 +4350,8 @@
     <p:bg>
       <p:bgPr>
         <a:solidFill>
-          <a:schemeClr val="accent1">
-            <a:lumMod val="75000"/>
+          <a:schemeClr val="accent5">
+            <a:lumMod val="50000"/>
           </a:schemeClr>
         </a:solidFill>
         <a:effectLst/>
@@ -4460,65 +4379,24 @@
       </p:grpSpPr>
       <p:sp>
         <p:nvSpPr>
-          <p:cNvPr id="2" name="Title 1">
-            <a:extLst>
-              <a:ext uri="{FF2B5EF4-FFF2-40B4-BE49-F238E27FC236}">
-                <a16:creationId xmlns:a16="http://schemas.microsoft.com/office/drawing/2014/main" id="{705E9700-242A-8DF5-A676-275DCBDE7445}"/>
-              </a:ext>
-            </a:extLst>
-          </p:cNvPr>
-          <p:cNvSpPr>
-            <a:spLocks noGrp="1"/>
-          </p:cNvSpPr>
-          <p:nvPr>
-            <p:ph type="ctrTitle"/>
+          <p:cNvPr id="3" name="Subtitle 2">
+            <a:extLst>
+              <a:ext uri="{FF2B5EF4-FFF2-40B4-BE49-F238E27FC236}">
+                <a16:creationId xmlns:a16="http://schemas.microsoft.com/office/drawing/2014/main" id="{62F90C93-4119-10B3-277C-C678FB486704}"/>
+              </a:ext>
+            </a:extLst>
+          </p:cNvPr>
+          <p:cNvSpPr>
+            <a:spLocks noGrp="1"/>
+          </p:cNvSpPr>
+          <p:nvPr>
+            <p:ph type="subTitle" idx="1"/>
           </p:nvPr>
         </p:nvSpPr>
         <p:spPr>
           <a:xfrm>
-            <a:off x="0" y="22612"/>
-            <a:ext cx="12192000" cy="953572"/>
-          </a:xfrm>
-        </p:spPr>
-        <p:txBody>
-          <a:bodyPr>
-            <a:normAutofit/>
-          </a:bodyPr>
-          <a:lstStyle/>
-          <a:p>
-            <a:pPr algn="l"/>
-            <a:r>
-              <a:rPr lang="en-US" sz="4800" dirty="0">
-                <a:solidFill>
-                  <a:schemeClr val="bg1"/>
-                </a:solidFill>
-                <a:latin typeface="Avenir Book" panose="02000503020000020003" pitchFamily="2" charset="0"/>
-              </a:rPr>
-              <a:t>Pre-Chorus</a:t>
-            </a:r>
-          </a:p>
-        </p:txBody>
-      </p:sp>
-      <p:sp>
-        <p:nvSpPr>
-          <p:cNvPr id="3" name="Subtitle 2">
-            <a:extLst>
-              <a:ext uri="{FF2B5EF4-FFF2-40B4-BE49-F238E27FC236}">
-                <a16:creationId xmlns:a16="http://schemas.microsoft.com/office/drawing/2014/main" id="{62F90C93-4119-10B3-277C-C678FB486704}"/>
-              </a:ext>
-            </a:extLst>
-          </p:cNvPr>
-          <p:cNvSpPr>
-            <a:spLocks noGrp="1"/>
-          </p:cNvSpPr>
-          <p:nvPr>
-            <p:ph type="subTitle" idx="1"/>
-          </p:nvPr>
-        </p:nvSpPr>
-        <p:spPr>
-          <a:xfrm>
-            <a:off x="356260" y="976184"/>
-            <a:ext cx="11388436" cy="5301047"/>
+            <a:off x="356260" y="304800"/>
+            <a:ext cx="11388436" cy="6149788"/>
           </a:xfrm>
         </p:spPr>
         <p:txBody>
@@ -4529,7 +4407,7 @@
           <a:p>
             <a:pPr algn="l"/>
             <a:r>
-              <a:rPr lang="en-US" sz="3200" dirty="0">
+              <a:rPr lang="en-US" sz="3600" dirty="0">
                 <a:solidFill>
                   <a:schemeClr val="bg1"/>
                 </a:solidFill>
@@ -4538,7 +4416,7 @@
               <a:t>                           </a:t>
             </a:r>
             <a:r>
-              <a:rPr lang="en-US" sz="3200" dirty="0">
+              <a:rPr lang="en-US" sz="3600" dirty="0">
                 <a:solidFill>
                   <a:srgbClr val="FFFF00"/>
                 </a:solidFill>
@@ -4550,7 +4428,7 @@
           <a:p>
             <a:pPr algn="l"/>
             <a:r>
-              <a:rPr lang="en-US" sz="3200" dirty="0" err="1">
+              <a:rPr lang="en-US" sz="3600" dirty="0" err="1">
                 <a:solidFill>
                   <a:schemeClr val="bg1"/>
                 </a:solidFill>
@@ -4559,7 +4437,7 @@
               <a:t>'Cause</a:t>
             </a:r>
             <a:r>
-              <a:rPr lang="en-US" sz="3200" dirty="0">
+              <a:rPr lang="en-US" sz="3600" dirty="0">
                 <a:solidFill>
                   <a:schemeClr val="bg1"/>
                 </a:solidFill>
@@ -4571,7 +4449,7 @@
           <a:p>
             <a:pPr algn="l"/>
             <a:r>
-              <a:rPr lang="en-US" sz="3200" dirty="0">
+              <a:rPr lang="en-US" sz="3600" dirty="0">
                 <a:solidFill>
                   <a:schemeClr val="bg1"/>
                 </a:solidFill>
@@ -4580,7 +4458,7 @@
               <a:t>             </a:t>
             </a:r>
             <a:r>
-              <a:rPr lang="en-US" sz="3200" dirty="0">
+              <a:rPr lang="en-US" sz="3600" dirty="0">
                 <a:solidFill>
                   <a:srgbClr val="FFFF00"/>
                 </a:solidFill>
@@ -4588,7 +4466,7 @@
               </a:rPr>
               <a:t>C                              G</a:t>
             </a:r>
-            <a:endParaRPr lang="en-US" sz="3200" dirty="0">
+            <a:endParaRPr lang="en-US" sz="3600" dirty="0">
               <a:solidFill>
                 <a:schemeClr val="bg1"/>
               </a:solidFill>
@@ -4598,7 +4476,7 @@
           <a:p>
             <a:pPr algn="l"/>
             <a:r>
-              <a:rPr lang="en-US" sz="3200" dirty="0">
+              <a:rPr lang="en-US" sz="3600" dirty="0">
                 <a:solidFill>
                   <a:schemeClr val="bg1"/>
                 </a:solidFill>
@@ -4610,7 +4488,7 @@
           <a:p>
             <a:pPr algn="l"/>
             <a:r>
-              <a:rPr lang="en-US" sz="3200" dirty="0">
+              <a:rPr lang="en-US" sz="3600" dirty="0">
                 <a:solidFill>
                   <a:schemeClr val="bg1"/>
                 </a:solidFill>
@@ -4619,7 +4497,7 @@
               <a:t>  </a:t>
             </a:r>
             <a:r>
-              <a:rPr lang="en-US" sz="3200" dirty="0">
+              <a:rPr lang="en-US" sz="3600" dirty="0">
                 <a:solidFill>
                   <a:srgbClr val="FFFF00"/>
                 </a:solidFill>
@@ -4627,7 +4505,7 @@
               </a:rPr>
               <a:t>                  D</a:t>
             </a:r>
-            <a:endParaRPr lang="en-US" sz="3200" dirty="0">
+            <a:endParaRPr lang="en-US" sz="3600" dirty="0">
               <a:solidFill>
                 <a:schemeClr val="bg1"/>
               </a:solidFill>
@@ -4637,7 +4515,7 @@
           <a:p>
             <a:pPr algn="l"/>
             <a:r>
-              <a:rPr lang="en-US" sz="3200" dirty="0">
+              <a:rPr lang="en-US" sz="3600" dirty="0">
                 <a:solidFill>
                   <a:schemeClr val="bg1"/>
                 </a:solidFill>
@@ -4649,7 +4527,7 @@
           <a:p>
             <a:pPr algn="l"/>
             <a:r>
-              <a:rPr lang="en-US" sz="3200" dirty="0">
+              <a:rPr lang="en-US" sz="3600" dirty="0">
                 <a:solidFill>
                   <a:srgbClr val="FFFF00"/>
                 </a:solidFill>
@@ -4661,7 +4539,7 @@
           <a:p>
             <a:pPr algn="l"/>
             <a:r>
-              <a:rPr lang="en-US" sz="3200" dirty="0">
+              <a:rPr lang="en-US" sz="3600" dirty="0">
                 <a:solidFill>
                   <a:schemeClr val="bg1"/>
                 </a:solidFill>
@@ -4673,7 +4551,7 @@
           <a:p>
             <a:pPr algn="l"/>
             <a:r>
-              <a:rPr lang="en-US" sz="3200" dirty="0">
+              <a:rPr lang="en-US" sz="3600" dirty="0">
                 <a:solidFill>
                   <a:srgbClr val="FFFF00"/>
                 </a:solidFill>
@@ -4681,7 +4559,7 @@
               </a:rPr>
               <a:t>              D</a:t>
             </a:r>
-            <a:endParaRPr lang="en-US" sz="3200" dirty="0">
+            <a:endParaRPr lang="en-US" sz="3600" dirty="0">
               <a:solidFill>
                 <a:schemeClr val="bg1"/>
               </a:solidFill>
@@ -4691,7 +4569,7 @@
           <a:p>
             <a:pPr algn="l"/>
             <a:r>
-              <a:rPr lang="en-US" sz="3200" dirty="0">
+              <a:rPr lang="en-US" sz="3600" dirty="0">
                 <a:solidFill>
                   <a:schemeClr val="bg1"/>
                 </a:solidFill>
@@ -4915,8 +4793,8 @@
         </p:nvSpPr>
         <p:spPr>
           <a:xfrm>
-            <a:off x="9969817" y="6277231"/>
-            <a:ext cx="2131139" cy="523220"/>
+            <a:off x="8995720" y="6188845"/>
+            <a:ext cx="3080524" cy="646331"/>
           </a:xfrm>
           <a:prstGeom prst="rect">
             <a:avLst/>
@@ -4930,12 +4808,12 @@
           <a:lstStyle/>
           <a:p>
             <a:r>
-              <a:rPr lang="en-US" sz="2800" b="1" dirty="0">
-                <a:solidFill>
-                  <a:schemeClr val="bg1"/>
-                </a:solidFill>
-              </a:rPr>
-              <a:t>play x2</a:t>
+              <a:rPr lang="en-US" sz="3600" b="1" dirty="0">
+                <a:solidFill>
+                  <a:schemeClr val="bg1"/>
+                </a:solidFill>
+              </a:rPr>
+              <a:t>X2 to verse 2</a:t>
             </a:r>
           </a:p>
         </p:txBody>
@@ -4988,65 +4866,24 @@
       </p:grpSpPr>
       <p:sp>
         <p:nvSpPr>
-          <p:cNvPr id="2" name="Title 1">
-            <a:extLst>
-              <a:ext uri="{FF2B5EF4-FFF2-40B4-BE49-F238E27FC236}">
-                <a16:creationId xmlns:a16="http://schemas.microsoft.com/office/drawing/2014/main" id="{F84EE1F9-0E06-9E49-4B5D-A1794F99DADB}"/>
-              </a:ext>
-            </a:extLst>
-          </p:cNvPr>
-          <p:cNvSpPr>
-            <a:spLocks noGrp="1"/>
-          </p:cNvSpPr>
-          <p:nvPr>
-            <p:ph type="ctrTitle"/>
+          <p:cNvPr id="3" name="Subtitle 2">
+            <a:extLst>
+              <a:ext uri="{FF2B5EF4-FFF2-40B4-BE49-F238E27FC236}">
+                <a16:creationId xmlns:a16="http://schemas.microsoft.com/office/drawing/2014/main" id="{64E071A1-A709-8D52-8851-9BD28B97E206}"/>
+              </a:ext>
+            </a:extLst>
+          </p:cNvPr>
+          <p:cNvSpPr>
+            <a:spLocks noGrp="1"/>
+          </p:cNvSpPr>
+          <p:nvPr>
+            <p:ph type="subTitle" idx="1"/>
           </p:nvPr>
         </p:nvSpPr>
         <p:spPr>
           <a:xfrm>
-            <a:off x="0" y="22612"/>
-            <a:ext cx="12192000" cy="953572"/>
-          </a:xfrm>
-        </p:spPr>
-        <p:txBody>
-          <a:bodyPr>
-            <a:normAutofit/>
-          </a:bodyPr>
-          <a:lstStyle/>
-          <a:p>
-            <a:pPr algn="l"/>
-            <a:r>
-              <a:rPr lang="en-US" sz="4800" dirty="0">
-                <a:solidFill>
-                  <a:schemeClr val="bg1"/>
-                </a:solidFill>
-                <a:latin typeface="Avenir Book" panose="02000503020000020003" pitchFamily="2" charset="0"/>
-              </a:rPr>
-              <a:t>Verse 2</a:t>
-            </a:r>
-          </a:p>
-        </p:txBody>
-      </p:sp>
-      <p:sp>
-        <p:nvSpPr>
-          <p:cNvPr id="3" name="Subtitle 2">
-            <a:extLst>
-              <a:ext uri="{FF2B5EF4-FFF2-40B4-BE49-F238E27FC236}">
-                <a16:creationId xmlns:a16="http://schemas.microsoft.com/office/drawing/2014/main" id="{64E071A1-A709-8D52-8851-9BD28B97E206}"/>
-              </a:ext>
-            </a:extLst>
-          </p:cNvPr>
-          <p:cNvSpPr>
-            <a:spLocks noGrp="1"/>
-          </p:cNvSpPr>
-          <p:nvPr>
-            <p:ph type="subTitle" idx="1"/>
-          </p:nvPr>
-        </p:nvSpPr>
-        <p:spPr>
-          <a:xfrm>
-            <a:off x="356260" y="976184"/>
-            <a:ext cx="11388436" cy="5301047"/>
+            <a:off x="356260" y="340660"/>
+            <a:ext cx="11388436" cy="6167716"/>
           </a:xfrm>
         </p:spPr>
         <p:txBody>
@@ -5171,8 +5008,8 @@
     <p:bg>
       <p:bgPr>
         <a:solidFill>
-          <a:schemeClr val="accent1">
-            <a:lumMod val="75000"/>
+          <a:schemeClr val="accent5">
+            <a:lumMod val="50000"/>
           </a:schemeClr>
         </a:solidFill>
         <a:effectLst/>
@@ -5200,65 +5037,24 @@
       </p:grpSpPr>
       <p:sp>
         <p:nvSpPr>
-          <p:cNvPr id="2" name="Title 1">
-            <a:extLst>
-              <a:ext uri="{FF2B5EF4-FFF2-40B4-BE49-F238E27FC236}">
-                <a16:creationId xmlns:a16="http://schemas.microsoft.com/office/drawing/2014/main" id="{4E9816DC-8FC9-2A67-A90B-4A9240D1E076}"/>
-              </a:ext>
-            </a:extLst>
-          </p:cNvPr>
-          <p:cNvSpPr>
-            <a:spLocks noGrp="1"/>
-          </p:cNvSpPr>
-          <p:nvPr>
-            <p:ph type="ctrTitle"/>
+          <p:cNvPr id="3" name="Subtitle 2">
+            <a:extLst>
+              <a:ext uri="{FF2B5EF4-FFF2-40B4-BE49-F238E27FC236}">
+                <a16:creationId xmlns:a16="http://schemas.microsoft.com/office/drawing/2014/main" id="{ED28EB23-FD38-7801-5BDE-85C9DEDD2778}"/>
+              </a:ext>
+            </a:extLst>
+          </p:cNvPr>
+          <p:cNvSpPr>
+            <a:spLocks noGrp="1"/>
+          </p:cNvSpPr>
+          <p:nvPr>
+            <p:ph type="subTitle" idx="1"/>
           </p:nvPr>
         </p:nvSpPr>
         <p:spPr>
           <a:xfrm>
-            <a:off x="0" y="22612"/>
-            <a:ext cx="12192000" cy="953572"/>
-          </a:xfrm>
-        </p:spPr>
-        <p:txBody>
-          <a:bodyPr>
-            <a:normAutofit/>
-          </a:bodyPr>
-          <a:lstStyle/>
-          <a:p>
-            <a:pPr algn="l"/>
-            <a:r>
-              <a:rPr lang="en-US" sz="4800" dirty="0">
-                <a:solidFill>
-                  <a:schemeClr val="bg1"/>
-                </a:solidFill>
-                <a:latin typeface="Avenir Book" panose="02000503020000020003" pitchFamily="2" charset="0"/>
-              </a:rPr>
-              <a:t>Pre-Chorus</a:t>
-            </a:r>
-          </a:p>
-        </p:txBody>
-      </p:sp>
-      <p:sp>
-        <p:nvSpPr>
-          <p:cNvPr id="3" name="Subtitle 2">
-            <a:extLst>
-              <a:ext uri="{FF2B5EF4-FFF2-40B4-BE49-F238E27FC236}">
-                <a16:creationId xmlns:a16="http://schemas.microsoft.com/office/drawing/2014/main" id="{ED28EB23-FD38-7801-5BDE-85C9DEDD2778}"/>
-              </a:ext>
-            </a:extLst>
-          </p:cNvPr>
-          <p:cNvSpPr>
-            <a:spLocks noGrp="1"/>
-          </p:cNvSpPr>
-          <p:nvPr>
-            <p:ph type="subTitle" idx="1"/>
-          </p:nvPr>
-        </p:nvSpPr>
-        <p:spPr>
-          <a:xfrm>
-            <a:off x="356260" y="976184"/>
-            <a:ext cx="11388436" cy="5301047"/>
+            <a:off x="356260" y="268942"/>
+            <a:ext cx="11388436" cy="6589058"/>
           </a:xfrm>
         </p:spPr>
         <p:txBody>
@@ -5269,7 +5065,7 @@
           <a:p>
             <a:pPr algn="l"/>
             <a:r>
-              <a:rPr lang="en-US" sz="3200" dirty="0">
+              <a:rPr lang="en-US" sz="3600" dirty="0">
                 <a:solidFill>
                   <a:schemeClr val="bg1"/>
                 </a:solidFill>
@@ -5278,7 +5074,7 @@
               <a:t>                           </a:t>
             </a:r>
             <a:r>
-              <a:rPr lang="en-US" sz="3200" dirty="0">
+              <a:rPr lang="en-US" sz="3600" dirty="0">
                 <a:solidFill>
                   <a:srgbClr val="FFFF00"/>
                 </a:solidFill>
@@ -5290,7 +5086,7 @@
           <a:p>
             <a:pPr algn="l"/>
             <a:r>
-              <a:rPr lang="en-US" sz="3200" dirty="0" err="1">
+              <a:rPr lang="en-US" sz="3600" dirty="0" err="1">
                 <a:solidFill>
                   <a:schemeClr val="bg1"/>
                 </a:solidFill>
@@ -5299,7 +5095,7 @@
               <a:t>'Cause</a:t>
             </a:r>
             <a:r>
-              <a:rPr lang="en-US" sz="3200" dirty="0">
+              <a:rPr lang="en-US" sz="3600" dirty="0">
                 <a:solidFill>
                   <a:schemeClr val="bg1"/>
                 </a:solidFill>
@@ -5311,7 +5107,7 @@
           <a:p>
             <a:pPr algn="l"/>
             <a:r>
-              <a:rPr lang="en-US" sz="3200" dirty="0">
+              <a:rPr lang="en-US" sz="3600" dirty="0">
                 <a:solidFill>
                   <a:schemeClr val="bg1"/>
                 </a:solidFill>
@@ -5320,7 +5116,7 @@
               <a:t>             </a:t>
             </a:r>
             <a:r>
-              <a:rPr lang="en-US" sz="3200" dirty="0">
+              <a:rPr lang="en-US" sz="3600" dirty="0">
                 <a:solidFill>
                   <a:srgbClr val="FFFF00"/>
                 </a:solidFill>
@@ -5328,7 +5124,7 @@
               </a:rPr>
               <a:t>C                              G</a:t>
             </a:r>
-            <a:endParaRPr lang="en-US" sz="3200" dirty="0">
+            <a:endParaRPr lang="en-US" sz="3600" dirty="0">
               <a:solidFill>
                 <a:schemeClr val="bg1"/>
               </a:solidFill>
@@ -5338,7 +5134,7 @@
           <a:p>
             <a:pPr algn="l"/>
             <a:r>
-              <a:rPr lang="en-US" sz="3200" dirty="0">
+              <a:rPr lang="en-US" sz="3600" dirty="0">
                 <a:solidFill>
                   <a:schemeClr val="bg1"/>
                 </a:solidFill>
@@ -5350,7 +5146,7 @@
           <a:p>
             <a:pPr algn="l"/>
             <a:r>
-              <a:rPr lang="en-US" sz="3200" dirty="0">
+              <a:rPr lang="en-US" sz="3600" dirty="0">
                 <a:solidFill>
                   <a:schemeClr val="bg1"/>
                 </a:solidFill>
@@ -5359,7 +5155,7 @@
               <a:t>  </a:t>
             </a:r>
             <a:r>
-              <a:rPr lang="en-US" sz="3200" dirty="0">
+              <a:rPr lang="en-US" sz="3600" dirty="0">
                 <a:solidFill>
                   <a:srgbClr val="FFFF00"/>
                 </a:solidFill>
@@ -5367,7 +5163,7 @@
               </a:rPr>
               <a:t>                  D</a:t>
             </a:r>
-            <a:endParaRPr lang="en-US" sz="3200" dirty="0">
+            <a:endParaRPr lang="en-US" sz="3600" dirty="0">
               <a:solidFill>
                 <a:schemeClr val="bg1"/>
               </a:solidFill>
@@ -5377,7 +5173,7 @@
           <a:p>
             <a:pPr algn="l"/>
             <a:r>
-              <a:rPr lang="en-US" sz="3200" dirty="0">
+              <a:rPr lang="en-US" sz="3600" dirty="0">
                 <a:solidFill>
                   <a:schemeClr val="bg1"/>
                 </a:solidFill>
@@ -5389,7 +5185,7 @@
           <a:p>
             <a:pPr algn="l"/>
             <a:r>
-              <a:rPr lang="en-US" sz="3200" dirty="0">
+              <a:rPr lang="en-US" sz="3600" dirty="0">
                 <a:solidFill>
                   <a:srgbClr val="FFFF00"/>
                 </a:solidFill>
@@ -5401,7 +5197,7 @@
           <a:p>
             <a:pPr algn="l"/>
             <a:r>
-              <a:rPr lang="en-US" sz="3200" dirty="0">
+              <a:rPr lang="en-US" sz="3600" dirty="0">
                 <a:solidFill>
                   <a:schemeClr val="bg1"/>
                 </a:solidFill>
@@ -5413,7 +5209,7 @@
           <a:p>
             <a:pPr algn="l"/>
             <a:r>
-              <a:rPr lang="en-US" sz="3200" dirty="0">
+              <a:rPr lang="en-US" sz="3600" dirty="0">
                 <a:solidFill>
                   <a:srgbClr val="FFFF00"/>
                 </a:solidFill>
@@ -5421,7 +5217,7 @@
               </a:rPr>
               <a:t>              D</a:t>
             </a:r>
-            <a:endParaRPr lang="en-US" sz="3200" dirty="0">
+            <a:endParaRPr lang="en-US" sz="3600" dirty="0">
               <a:solidFill>
                 <a:schemeClr val="bg1"/>
               </a:solidFill>
@@ -5431,7 +5227,7 @@
           <a:p>
             <a:pPr algn="l"/>
             <a:r>
-              <a:rPr lang="en-US" sz="3200" dirty="0">
+              <a:rPr lang="en-US" sz="3600" dirty="0">
                 <a:solidFill>
                   <a:schemeClr val="bg1"/>
                 </a:solidFill>
@@ -5488,65 +5284,24 @@
       </p:grpSpPr>
       <p:sp>
         <p:nvSpPr>
-          <p:cNvPr id="2" name="Title 1">
-            <a:extLst>
-              <a:ext uri="{FF2B5EF4-FFF2-40B4-BE49-F238E27FC236}">
-                <a16:creationId xmlns:a16="http://schemas.microsoft.com/office/drawing/2014/main" id="{55285CB3-9C53-22BC-C4B0-F523CFD4AD88}"/>
-              </a:ext>
-            </a:extLst>
-          </p:cNvPr>
-          <p:cNvSpPr>
-            <a:spLocks noGrp="1"/>
-          </p:cNvSpPr>
-          <p:nvPr>
-            <p:ph type="ctrTitle"/>
+          <p:cNvPr id="3" name="Subtitle 2">
+            <a:extLst>
+              <a:ext uri="{FF2B5EF4-FFF2-40B4-BE49-F238E27FC236}">
+                <a16:creationId xmlns:a16="http://schemas.microsoft.com/office/drawing/2014/main" id="{2C0827AA-9AA3-F6AE-8CE0-8CBCF323E8D2}"/>
+              </a:ext>
+            </a:extLst>
+          </p:cNvPr>
+          <p:cNvSpPr>
+            <a:spLocks noGrp="1"/>
+          </p:cNvSpPr>
+          <p:nvPr>
+            <p:ph type="subTitle" idx="1"/>
           </p:nvPr>
         </p:nvSpPr>
         <p:spPr>
           <a:xfrm>
-            <a:off x="0" y="22612"/>
-            <a:ext cx="12192000" cy="953572"/>
-          </a:xfrm>
-        </p:spPr>
-        <p:txBody>
-          <a:bodyPr>
-            <a:normAutofit/>
-          </a:bodyPr>
-          <a:lstStyle/>
-          <a:p>
-            <a:pPr algn="l"/>
-            <a:r>
-              <a:rPr lang="en-US" sz="4800" dirty="0">
-                <a:solidFill>
-                  <a:schemeClr val="bg1"/>
-                </a:solidFill>
-                <a:latin typeface="Avenir Book" panose="02000503020000020003" pitchFamily="2" charset="0"/>
-              </a:rPr>
-              <a:t>Chorus 1</a:t>
-            </a:r>
-          </a:p>
-        </p:txBody>
-      </p:sp>
-      <p:sp>
-        <p:nvSpPr>
-          <p:cNvPr id="3" name="Subtitle 2">
-            <a:extLst>
-              <a:ext uri="{FF2B5EF4-FFF2-40B4-BE49-F238E27FC236}">
-                <a16:creationId xmlns:a16="http://schemas.microsoft.com/office/drawing/2014/main" id="{2C0827AA-9AA3-F6AE-8CE0-8CBCF323E8D2}"/>
-              </a:ext>
-            </a:extLst>
-          </p:cNvPr>
-          <p:cNvSpPr>
-            <a:spLocks noGrp="1"/>
-          </p:cNvSpPr>
-          <p:nvPr>
-            <p:ph type="subTitle" idx="1"/>
-          </p:nvPr>
-        </p:nvSpPr>
-        <p:spPr>
-          <a:xfrm>
-            <a:off x="356260" y="976184"/>
-            <a:ext cx="11388436" cy="5301047"/>
+            <a:off x="356260" y="333632"/>
+            <a:ext cx="11388436" cy="6264876"/>
           </a:xfrm>
         </p:spPr>
         <p:txBody>
@@ -5728,65 +5483,24 @@
       </p:grpSpPr>
       <p:sp>
         <p:nvSpPr>
-          <p:cNvPr id="2" name="Title 1">
-            <a:extLst>
-              <a:ext uri="{FF2B5EF4-FFF2-40B4-BE49-F238E27FC236}">
-                <a16:creationId xmlns:a16="http://schemas.microsoft.com/office/drawing/2014/main" id="{D30FE63D-3243-8BE5-50D5-96713B873F86}"/>
-              </a:ext>
-            </a:extLst>
-          </p:cNvPr>
-          <p:cNvSpPr>
-            <a:spLocks noGrp="1"/>
-          </p:cNvSpPr>
-          <p:nvPr>
-            <p:ph type="ctrTitle"/>
+          <p:cNvPr id="3" name="Subtitle 2">
+            <a:extLst>
+              <a:ext uri="{FF2B5EF4-FFF2-40B4-BE49-F238E27FC236}">
+                <a16:creationId xmlns:a16="http://schemas.microsoft.com/office/drawing/2014/main" id="{1E48F5C2-0EC0-0D97-FBEB-AF3A71E53397}"/>
+              </a:ext>
+            </a:extLst>
+          </p:cNvPr>
+          <p:cNvSpPr>
+            <a:spLocks noGrp="1"/>
+          </p:cNvSpPr>
+          <p:nvPr>
+            <p:ph type="subTitle" idx="1"/>
           </p:nvPr>
         </p:nvSpPr>
         <p:spPr>
           <a:xfrm>
-            <a:off x="0" y="22612"/>
-            <a:ext cx="12192000" cy="953572"/>
-          </a:xfrm>
-        </p:spPr>
-        <p:txBody>
-          <a:bodyPr>
-            <a:normAutofit/>
-          </a:bodyPr>
-          <a:lstStyle/>
-          <a:p>
-            <a:pPr algn="l"/>
-            <a:r>
-              <a:rPr lang="en-US" sz="4800" dirty="0">
-                <a:solidFill>
-                  <a:schemeClr val="bg1"/>
-                </a:solidFill>
-                <a:latin typeface="Avenir Book" panose="02000503020000020003" pitchFamily="2" charset="0"/>
-              </a:rPr>
-              <a:t>Chorus 2</a:t>
-            </a:r>
-          </a:p>
-        </p:txBody>
-      </p:sp>
-      <p:sp>
-        <p:nvSpPr>
-          <p:cNvPr id="3" name="Subtitle 2">
-            <a:extLst>
-              <a:ext uri="{FF2B5EF4-FFF2-40B4-BE49-F238E27FC236}">
-                <a16:creationId xmlns:a16="http://schemas.microsoft.com/office/drawing/2014/main" id="{1E48F5C2-0EC0-0D97-FBEB-AF3A71E53397}"/>
-              </a:ext>
-            </a:extLst>
-          </p:cNvPr>
-          <p:cNvSpPr>
-            <a:spLocks noGrp="1"/>
-          </p:cNvSpPr>
-          <p:nvPr>
-            <p:ph type="subTitle" idx="1"/>
-          </p:nvPr>
-        </p:nvSpPr>
-        <p:spPr>
-          <a:xfrm>
-            <a:off x="356260" y="976184"/>
-            <a:ext cx="11388436" cy="5301047"/>
+            <a:off x="356260" y="284205"/>
+            <a:ext cx="11388436" cy="6326659"/>
           </a:xfrm>
         </p:spPr>
         <p:txBody>
@@ -5938,8 +5652,8 @@
     <p:bg>
       <p:bgPr>
         <a:solidFill>
-          <a:schemeClr val="accent1">
-            <a:lumMod val="75000"/>
+          <a:schemeClr val="accent5">
+            <a:lumMod val="50000"/>
           </a:schemeClr>
         </a:solidFill>
         <a:effectLst/>
@@ -5950,7 +5664,7 @@
         <p:cNvPr id="1" name="">
           <a:extLst>
             <a:ext uri="{FF2B5EF4-FFF2-40B4-BE49-F238E27FC236}">
-              <a16:creationId xmlns:a16="http://schemas.microsoft.com/office/drawing/2014/main" id="{CED870E8-72B2-22C7-588E-BB2286B4A398}"/>
+              <a16:creationId xmlns:a16="http://schemas.microsoft.com/office/drawing/2014/main" id="{A8287C1B-C488-C749-4909-94AC82F40067}"/>
             </a:ext>
           </a:extLst>
         </p:cNvPr>
@@ -5967,65 +5681,24 @@
       </p:grpSpPr>
       <p:sp>
         <p:nvSpPr>
-          <p:cNvPr id="2" name="Title 1">
-            <a:extLst>
-              <a:ext uri="{FF2B5EF4-FFF2-40B4-BE49-F238E27FC236}">
-                <a16:creationId xmlns:a16="http://schemas.microsoft.com/office/drawing/2014/main" id="{392A7CB3-1DA1-C646-D861-3B87F377A626}"/>
-              </a:ext>
-            </a:extLst>
-          </p:cNvPr>
-          <p:cNvSpPr>
-            <a:spLocks noGrp="1"/>
-          </p:cNvSpPr>
-          <p:nvPr>
-            <p:ph type="ctrTitle"/>
+          <p:cNvPr id="3" name="Subtitle 2">
+            <a:extLst>
+              <a:ext uri="{FF2B5EF4-FFF2-40B4-BE49-F238E27FC236}">
+                <a16:creationId xmlns:a16="http://schemas.microsoft.com/office/drawing/2014/main" id="{CF49822D-CD2D-EC7F-E64D-1BB2E6799227}"/>
+              </a:ext>
+            </a:extLst>
+          </p:cNvPr>
+          <p:cNvSpPr>
+            <a:spLocks noGrp="1"/>
+          </p:cNvSpPr>
+          <p:nvPr>
+            <p:ph type="subTitle" idx="1"/>
           </p:nvPr>
         </p:nvSpPr>
         <p:spPr>
           <a:xfrm>
-            <a:off x="0" y="22612"/>
-            <a:ext cx="12192000" cy="953572"/>
-          </a:xfrm>
-        </p:spPr>
-        <p:txBody>
-          <a:bodyPr>
-            <a:normAutofit/>
-          </a:bodyPr>
-          <a:lstStyle/>
-          <a:p>
-            <a:pPr algn="l"/>
-            <a:r>
-              <a:rPr lang="en-US" sz="4800" dirty="0">
-                <a:solidFill>
-                  <a:schemeClr val="bg1"/>
-                </a:solidFill>
-                <a:latin typeface="Avenir Book" panose="02000503020000020003" pitchFamily="2" charset="0"/>
-              </a:rPr>
-              <a:t>Pre-Chorus</a:t>
-            </a:r>
-          </a:p>
-        </p:txBody>
-      </p:sp>
-      <p:sp>
-        <p:nvSpPr>
-          <p:cNvPr id="3" name="Subtitle 2">
-            <a:extLst>
-              <a:ext uri="{FF2B5EF4-FFF2-40B4-BE49-F238E27FC236}">
-                <a16:creationId xmlns:a16="http://schemas.microsoft.com/office/drawing/2014/main" id="{067B346C-470C-43DF-5AFD-F13FC092EA86}"/>
-              </a:ext>
-            </a:extLst>
-          </p:cNvPr>
-          <p:cNvSpPr>
-            <a:spLocks noGrp="1"/>
-          </p:cNvSpPr>
-          <p:nvPr>
-            <p:ph type="subTitle" idx="1"/>
-          </p:nvPr>
-        </p:nvSpPr>
-        <p:spPr>
-          <a:xfrm>
-            <a:off x="356260" y="976184"/>
-            <a:ext cx="11388436" cy="5301047"/>
+            <a:off x="356260" y="268942"/>
+            <a:ext cx="8769811" cy="6589058"/>
           </a:xfrm>
         </p:spPr>
         <p:txBody>
@@ -6036,7 +5709,7 @@
           <a:p>
             <a:pPr algn="l"/>
             <a:r>
-              <a:rPr lang="en-US" sz="3200" dirty="0">
+              <a:rPr lang="en-US" sz="3600" dirty="0">
                 <a:solidFill>
                   <a:schemeClr val="bg1"/>
                 </a:solidFill>
@@ -6045,7 +5718,7 @@
               <a:t>                           </a:t>
             </a:r>
             <a:r>
-              <a:rPr lang="en-US" sz="3200" dirty="0">
+              <a:rPr lang="en-US" sz="3600" dirty="0">
                 <a:solidFill>
                   <a:srgbClr val="FFFF00"/>
                 </a:solidFill>
@@ -6057,7 +5730,7 @@
           <a:p>
             <a:pPr algn="l"/>
             <a:r>
-              <a:rPr lang="en-US" sz="3200" dirty="0" err="1">
+              <a:rPr lang="en-US" sz="3600" dirty="0" err="1">
                 <a:solidFill>
                   <a:schemeClr val="bg1"/>
                 </a:solidFill>
@@ -6066,7 +5739,7 @@
               <a:t>'Cause</a:t>
             </a:r>
             <a:r>
-              <a:rPr lang="en-US" sz="3200" dirty="0">
+              <a:rPr lang="en-US" sz="3600" dirty="0">
                 <a:solidFill>
                   <a:schemeClr val="bg1"/>
                 </a:solidFill>
@@ -6078,7 +5751,7 @@
           <a:p>
             <a:pPr algn="l"/>
             <a:r>
-              <a:rPr lang="en-US" sz="3200" dirty="0">
+              <a:rPr lang="en-US" sz="3600" dirty="0">
                 <a:solidFill>
                   <a:schemeClr val="bg1"/>
                 </a:solidFill>
@@ -6087,7 +5760,7 @@
               <a:t>             </a:t>
             </a:r>
             <a:r>
-              <a:rPr lang="en-US" sz="3200" dirty="0">
+              <a:rPr lang="en-US" sz="3600" dirty="0">
                 <a:solidFill>
                   <a:srgbClr val="FFFF00"/>
                 </a:solidFill>
@@ -6095,7 +5768,7 @@
               </a:rPr>
               <a:t>C                              G</a:t>
             </a:r>
-            <a:endParaRPr lang="en-US" sz="3200" dirty="0">
+            <a:endParaRPr lang="en-US" sz="3600" dirty="0">
               <a:solidFill>
                 <a:schemeClr val="bg1"/>
               </a:solidFill>
@@ -6105,7 +5778,7 @@
           <a:p>
             <a:pPr algn="l"/>
             <a:r>
-              <a:rPr lang="en-US" sz="3200" dirty="0">
+              <a:rPr lang="en-US" sz="3600" dirty="0">
                 <a:solidFill>
                   <a:schemeClr val="bg1"/>
                 </a:solidFill>
@@ -6117,7 +5790,7 @@
           <a:p>
             <a:pPr algn="l"/>
             <a:r>
-              <a:rPr lang="en-US" sz="3200" dirty="0">
+              <a:rPr lang="en-US" sz="3600" dirty="0">
                 <a:solidFill>
                   <a:schemeClr val="bg1"/>
                 </a:solidFill>
@@ -6126,7 +5799,7 @@
               <a:t>  </a:t>
             </a:r>
             <a:r>
-              <a:rPr lang="en-US" sz="3200" dirty="0">
+              <a:rPr lang="en-US" sz="3600" dirty="0">
                 <a:solidFill>
                   <a:srgbClr val="FFFF00"/>
                 </a:solidFill>
@@ -6134,7 +5807,7 @@
               </a:rPr>
               <a:t>                  D</a:t>
             </a:r>
-            <a:endParaRPr lang="en-US" sz="3200" dirty="0">
+            <a:endParaRPr lang="en-US" sz="3600" dirty="0">
               <a:solidFill>
                 <a:schemeClr val="bg1"/>
               </a:solidFill>
@@ -6144,7 +5817,7 @@
           <a:p>
             <a:pPr algn="l"/>
             <a:r>
-              <a:rPr lang="en-US" sz="3200" dirty="0">
+              <a:rPr lang="en-US" sz="3600" dirty="0">
                 <a:solidFill>
                   <a:schemeClr val="bg1"/>
                 </a:solidFill>
@@ -6156,7 +5829,7 @@
           <a:p>
             <a:pPr algn="l"/>
             <a:r>
-              <a:rPr lang="en-US" sz="3200" dirty="0">
+              <a:rPr lang="en-US" sz="3600" dirty="0">
                 <a:solidFill>
                   <a:srgbClr val="FFFF00"/>
                 </a:solidFill>
@@ -6168,13 +5841,82 @@
           <a:p>
             <a:pPr algn="l"/>
             <a:r>
-              <a:rPr lang="en-US" sz="3200" dirty="0">
+              <a:rPr lang="en-US" sz="3600" dirty="0">
                 <a:solidFill>
                   <a:schemeClr val="bg1"/>
                 </a:solidFill>
                 <a:latin typeface="Avenir Book" panose="02000503020000020003" pitchFamily="2" charset="0"/>
               </a:rPr>
               <a:t>All our fears are washed away</a:t>
+            </a:r>
+          </a:p>
+          <a:p>
+            <a:pPr algn="l"/>
+            <a:r>
+              <a:rPr lang="en-US" sz="3600" dirty="0">
+                <a:solidFill>
+                  <a:srgbClr val="FFFF00"/>
+                </a:solidFill>
+                <a:latin typeface="Avenir Book" panose="02000503020000020003" pitchFamily="2" charset="0"/>
+              </a:rPr>
+              <a:t>              D</a:t>
+            </a:r>
+            <a:endParaRPr lang="en-US" sz="3600" dirty="0">
+              <a:solidFill>
+                <a:schemeClr val="bg1"/>
+              </a:solidFill>
+              <a:latin typeface="Avenir Book" panose="02000503020000020003" pitchFamily="2" charset="0"/>
+            </a:endParaRPr>
+          </a:p>
+          <a:p>
+            <a:pPr algn="l"/>
+            <a:r>
+              <a:rPr lang="en-US" sz="3600" dirty="0">
+                <a:solidFill>
+                  <a:schemeClr val="bg1"/>
+                </a:solidFill>
+                <a:latin typeface="Avenir Book" panose="02000503020000020003" pitchFamily="2" charset="0"/>
+              </a:rPr>
+              <a:t>washed  away</a:t>
+            </a:r>
+          </a:p>
+        </p:txBody>
+      </p:sp>
+      <p:sp>
+        <p:nvSpPr>
+          <p:cNvPr id="2" name="TextBox 1">
+            <a:extLst>
+              <a:ext uri="{FF2B5EF4-FFF2-40B4-BE49-F238E27FC236}">
+                <a16:creationId xmlns:a16="http://schemas.microsoft.com/office/drawing/2014/main" id="{B376C31B-0EB3-AE92-5497-6B0DB50D25BA}"/>
+              </a:ext>
+            </a:extLst>
+          </p:cNvPr>
+          <p:cNvSpPr txBox="1"/>
+          <p:nvPr/>
+        </p:nvSpPr>
+        <p:spPr>
+          <a:xfrm>
+            <a:off x="8390238" y="6042697"/>
+            <a:ext cx="3661319" cy="646331"/>
+          </a:xfrm>
+          <a:prstGeom prst="rect">
+            <a:avLst/>
+          </a:prstGeom>
+          <a:noFill/>
+        </p:spPr>
+        <p:txBody>
+          <a:bodyPr wrap="square" rtlCol="0">
+            <a:spAutoFit/>
+          </a:bodyPr>
+          <a:lstStyle/>
+          <a:p>
+            <a:r>
+              <a:rPr lang="en-US" sz="3600" b="1" dirty="0">
+                <a:solidFill>
+                  <a:schemeClr val="bg1"/>
+                </a:solidFill>
+              </a:rPr>
+              <a:t>x2 to chorus</a:t>
             </a:r>
           </a:p>
         </p:txBody>
@@ -6182,7 +5924,7 @@
     </p:spTree>
     <p:extLst>
       <p:ext uri="{BB962C8B-B14F-4D97-AF65-F5344CB8AC3E}">
-        <p14:creationId xmlns:p14="http://schemas.microsoft.com/office/powerpoint/2010/main" val="431289814"/>
+        <p14:creationId xmlns:p14="http://schemas.microsoft.com/office/powerpoint/2010/main" val="2301589569"/>
       </p:ext>
     </p:extLst>
   </p:cSld>

--- a/Hosanna (Praise is Rising)-CH.pptx
+++ b/Hosanna (Praise is Rising)-CH.pptx
@@ -269,7 +269,7 @@
           <a:p>
             <a:fld id="{5448A3D2-9408-4143-A73F-7F223505335E}" type="datetimeFigureOut">
               <a:rPr lang="en-US" smtClean="0"/>
-              <a:t>9/12/26</a:t>
+              <a:t>10/28/26</a:t>
             </a:fld>
             <a:endParaRPr lang="en-US"/>
           </a:p>
@@ -467,7 +467,7 @@
           <a:p>
             <a:fld id="{5448A3D2-9408-4143-A73F-7F223505335E}" type="datetimeFigureOut">
               <a:rPr lang="en-US" smtClean="0"/>
-              <a:t>9/12/26</a:t>
+              <a:t>10/28/26</a:t>
             </a:fld>
             <a:endParaRPr lang="en-US"/>
           </a:p>
@@ -675,7 +675,7 @@
           <a:p>
             <a:fld id="{5448A3D2-9408-4143-A73F-7F223505335E}" type="datetimeFigureOut">
               <a:rPr lang="en-US" smtClean="0"/>
-              <a:t>9/12/26</a:t>
+              <a:t>10/28/26</a:t>
             </a:fld>
             <a:endParaRPr lang="en-US"/>
           </a:p>
@@ -873,7 +873,7 @@
           <a:p>
             <a:fld id="{5448A3D2-9408-4143-A73F-7F223505335E}" type="datetimeFigureOut">
               <a:rPr lang="en-US" smtClean="0"/>
-              <a:t>9/12/26</a:t>
+              <a:t>10/28/26</a:t>
             </a:fld>
             <a:endParaRPr lang="en-US"/>
           </a:p>
@@ -1148,7 +1148,7 @@
           <a:p>
             <a:fld id="{5448A3D2-9408-4143-A73F-7F223505335E}" type="datetimeFigureOut">
               <a:rPr lang="en-US" smtClean="0"/>
-              <a:t>9/12/26</a:t>
+              <a:t>10/28/26</a:t>
             </a:fld>
             <a:endParaRPr lang="en-US"/>
           </a:p>
@@ -1413,7 +1413,7 @@
           <a:p>
             <a:fld id="{5448A3D2-9408-4143-A73F-7F223505335E}" type="datetimeFigureOut">
               <a:rPr lang="en-US" smtClean="0"/>
-              <a:t>9/12/26</a:t>
+              <a:t>10/28/26</a:t>
             </a:fld>
             <a:endParaRPr lang="en-US"/>
           </a:p>
@@ -1825,7 +1825,7 @@
           <a:p>
             <a:fld id="{5448A3D2-9408-4143-A73F-7F223505335E}" type="datetimeFigureOut">
               <a:rPr lang="en-US" smtClean="0"/>
-              <a:t>9/12/26</a:t>
+              <a:t>10/28/26</a:t>
             </a:fld>
             <a:endParaRPr lang="en-US"/>
           </a:p>
@@ -1966,7 +1966,7 @@
           <a:p>
             <a:fld id="{5448A3D2-9408-4143-A73F-7F223505335E}" type="datetimeFigureOut">
               <a:rPr lang="en-US" smtClean="0"/>
-              <a:t>9/12/26</a:t>
+              <a:t>10/28/26</a:t>
             </a:fld>
             <a:endParaRPr lang="en-US"/>
           </a:p>
@@ -2079,7 +2079,7 @@
           <a:p>
             <a:fld id="{5448A3D2-9408-4143-A73F-7F223505335E}" type="datetimeFigureOut">
               <a:rPr lang="en-US" smtClean="0"/>
-              <a:t>9/12/26</a:t>
+              <a:t>10/28/26</a:t>
             </a:fld>
             <a:endParaRPr lang="en-US"/>
           </a:p>
@@ -2390,7 +2390,7 @@
           <a:p>
             <a:fld id="{5448A3D2-9408-4143-A73F-7F223505335E}" type="datetimeFigureOut">
               <a:rPr lang="en-US" smtClean="0"/>
-              <a:t>9/12/26</a:t>
+              <a:t>10/28/26</a:t>
             </a:fld>
             <a:endParaRPr lang="en-US"/>
           </a:p>
@@ -2678,7 +2678,7 @@
           <a:p>
             <a:fld id="{5448A3D2-9408-4143-A73F-7F223505335E}" type="datetimeFigureOut">
               <a:rPr lang="en-US" smtClean="0"/>
-              <a:t>9/12/26</a:t>
+              <a:t>10/28/26</a:t>
             </a:fld>
             <a:endParaRPr lang="en-US"/>
           </a:p>
@@ -2919,7 +2919,7 @@
           <a:p>
             <a:fld id="{5448A3D2-9408-4143-A73F-7F223505335E}" type="datetimeFigureOut">
               <a:rPr lang="en-US" smtClean="0"/>
-              <a:t>9/12/26</a:t>
+              <a:t>10/28/26</a:t>
             </a:fld>
             <a:endParaRPr lang="en-US"/>
           </a:p>
